--- a/Figures/Figure2.pptx
+++ b/Figures/Figure2.pptx
@@ -3218,7 +3218,7 @@
           </p:nvSpPr>
           <p:spPr>
             <a:xfrm>
-              <a:off x="4702336" y="2855186"/>
+              <a:off x="4602158" y="2912822"/>
               <a:ext cx="117404" cy="117404"/>
             </a:xfrm>
             <a:prstGeom prst="ellipse">
@@ -3253,7 +3253,7 @@
           </p:nvSpPr>
           <p:spPr>
             <a:xfrm>
-              <a:off x="3358506" y="3097624"/>
+              <a:off x="2915298" y="2857329"/>
               <a:ext cx="117404" cy="117404"/>
             </a:xfrm>
             <a:prstGeom prst="ellipse">
@@ -3288,7 +3288,7 @@
           </p:nvSpPr>
           <p:spPr>
             <a:xfrm>
-              <a:off x="7998267" y="2806788"/>
+              <a:off x="7804141" y="2923728"/>
               <a:ext cx="117404" cy="117404"/>
             </a:xfrm>
             <a:prstGeom prst="ellipse">
@@ -3323,7 +3323,7 @@
           </p:nvSpPr>
           <p:spPr>
             <a:xfrm>
-              <a:off x="4523504" y="2942541"/>
+              <a:off x="4893318" y="2846467"/>
               <a:ext cx="117404" cy="117404"/>
             </a:xfrm>
             <a:prstGeom prst="ellipse">
@@ -3358,7 +3358,7 @@
           </p:nvSpPr>
           <p:spPr>
             <a:xfrm>
-              <a:off x="3275315" y="2325424"/>
+              <a:off x="3148275" y="2224486"/>
               <a:ext cx="117404" cy="117404"/>
             </a:xfrm>
             <a:prstGeom prst="ellipse">
@@ -3393,7 +3393,7 @@
           </p:nvSpPr>
           <p:spPr>
             <a:xfrm>
-              <a:off x="7831942" y="3062686"/>
+              <a:off x="7809100" y="2921977"/>
               <a:ext cx="117404" cy="117404"/>
             </a:xfrm>
             <a:prstGeom prst="ellipse">
@@ -3428,7 +3428,7 @@
           </p:nvSpPr>
           <p:spPr>
             <a:xfrm>
-              <a:off x="4961134" y="2222327"/>
+              <a:off x="4536790" y="2167172"/>
               <a:ext cx="117404" cy="117404"/>
             </a:xfrm>
             <a:prstGeom prst="ellipse">
@@ -3463,7 +3463,7 @@
           </p:nvSpPr>
           <p:spPr>
             <a:xfrm>
-              <a:off x="3318434" y="3099192"/>
+              <a:off x="2892104" y="3052834"/>
               <a:ext cx="117404" cy="117404"/>
             </a:xfrm>
             <a:prstGeom prst="ellipse">
@@ -3498,7 +3498,7 @@
           </p:nvSpPr>
           <p:spPr>
             <a:xfrm>
-              <a:off x="8171991" y="3512637"/>
+              <a:off x="8145933" y="3605264"/>
               <a:ext cx="117404" cy="117404"/>
             </a:xfrm>
             <a:prstGeom prst="ellipse">
@@ -3533,7 +3533,7 @@
           </p:nvSpPr>
           <p:spPr>
             <a:xfrm>
-              <a:off x="6045548" y="4628302"/>
+              <a:off x="6399828" y="4348236"/>
               <a:ext cx="117404" cy="117404"/>
             </a:xfrm>
             <a:prstGeom prst="ellipse">
@@ -3568,7 +3568,7 @@
           </p:nvSpPr>
           <p:spPr>
             <a:xfrm>
-              <a:off x="3268695" y="2552515"/>
+              <a:off x="3142654" y="2458726"/>
               <a:ext cx="117404" cy="117404"/>
             </a:xfrm>
             <a:prstGeom prst="ellipse">
@@ -3603,7 +3603,7 @@
           </p:nvSpPr>
           <p:spPr>
             <a:xfrm>
-              <a:off x="7652259" y="2309444"/>
+              <a:off x="8017281" y="2194833"/>
               <a:ext cx="117404" cy="117404"/>
             </a:xfrm>
             <a:prstGeom prst="ellipse">
@@ -3638,7 +3638,7 @@
           </p:nvSpPr>
           <p:spPr>
             <a:xfrm>
-              <a:off x="3291595" y="2167500"/>
+              <a:off x="2832398" y="2108719"/>
               <a:ext cx="117404" cy="117404"/>
             </a:xfrm>
             <a:prstGeom prst="ellipse">
@@ -3673,7 +3673,7 @@
           </p:nvSpPr>
           <p:spPr>
             <a:xfrm>
-              <a:off x="4612573" y="2455383"/>
+              <a:off x="4874867" y="2267731"/>
               <a:ext cx="117404" cy="117404"/>
             </a:xfrm>
             <a:prstGeom prst="ellipse">
@@ -3708,7 +3708,7 @@
           </p:nvSpPr>
           <p:spPr>
             <a:xfrm>
-              <a:off x="3297610" y="3109890"/>
+              <a:off x="3173595" y="2744501"/>
               <a:ext cx="117404" cy="117404"/>
             </a:xfrm>
             <a:prstGeom prst="ellipse">
@@ -3743,7 +3743,7 @@
           </p:nvSpPr>
           <p:spPr>
             <a:xfrm>
-              <a:off x="4599208" y="3522401"/>
+              <a:off x="4527492" y="3490496"/>
               <a:ext cx="117404" cy="117404"/>
             </a:xfrm>
             <a:prstGeom prst="ellipse">
@@ -3778,7 +3778,7 @@
           </p:nvSpPr>
           <p:spPr>
             <a:xfrm>
-              <a:off x="5981511" y="3312898"/>
+              <a:off x="6174333" y="3200951"/>
               <a:ext cx="117404" cy="117404"/>
             </a:xfrm>
             <a:prstGeom prst="ellipse">
@@ -3813,7 +3813,7 @@
           </p:nvSpPr>
           <p:spPr>
             <a:xfrm>
-              <a:off x="4559392" y="2745486"/>
+              <a:off x="4372197" y="2707406"/>
               <a:ext cx="117404" cy="117404"/>
             </a:xfrm>
             <a:prstGeom prst="ellipse">
@@ -3848,7 +3848,7 @@
           </p:nvSpPr>
           <p:spPr>
             <a:xfrm>
-              <a:off x="6179807" y="2499724"/>
+              <a:off x="6066338" y="2491168"/>
               <a:ext cx="117404" cy="117404"/>
             </a:xfrm>
             <a:prstGeom prst="ellipse">
@@ -3883,7 +3883,7 @@
           </p:nvSpPr>
           <p:spPr>
             <a:xfrm>
-              <a:off x="7842388" y="2543094"/>
+              <a:off x="7780845" y="2194345"/>
               <a:ext cx="117404" cy="117404"/>
             </a:xfrm>
             <a:prstGeom prst="ellipse">
@@ -3918,7 +3918,7 @@
           </p:nvSpPr>
           <p:spPr>
             <a:xfrm>
-              <a:off x="3065451" y="3046760"/>
+              <a:off x="3086420" y="2810664"/>
               <a:ext cx="117404" cy="117404"/>
             </a:xfrm>
             <a:prstGeom prst="ellipse">
@@ -3953,7 +3953,7 @@
           </p:nvSpPr>
           <p:spPr>
             <a:xfrm>
-              <a:off x="4814192" y="3165203"/>
+              <a:off x="4373826" y="2815739"/>
               <a:ext cx="117404" cy="117404"/>
             </a:xfrm>
             <a:prstGeom prst="ellipse">
@@ -3988,7 +3988,7 @@
           </p:nvSpPr>
           <p:spPr>
             <a:xfrm>
-              <a:off x="6561186" y="2826467"/>
+              <a:off x="6456139" y="2762950"/>
               <a:ext cx="117404" cy="117404"/>
             </a:xfrm>
             <a:prstGeom prst="ellipse">
@@ -4023,7 +4023,7 @@
           </p:nvSpPr>
           <p:spPr>
             <a:xfrm>
-              <a:off x="4600887" y="2402195"/>
+              <a:off x="4607842" y="2276281"/>
               <a:ext cx="117404" cy="117404"/>
             </a:xfrm>
             <a:prstGeom prst="ellipse">
@@ -4058,7 +4058,7 @@
           </p:nvSpPr>
           <p:spPr>
             <a:xfrm>
-              <a:off x="7714027" y="2158327"/>
+              <a:off x="7869089" y="2302296"/>
               <a:ext cx="117404" cy="117404"/>
             </a:xfrm>
             <a:prstGeom prst="ellipse">
@@ -4093,7 +4093,7 @@
           </p:nvSpPr>
           <p:spPr>
             <a:xfrm>
-              <a:off x="3193011" y="3069857"/>
+              <a:off x="3363562" y="2658305"/>
               <a:ext cx="117404" cy="117404"/>
             </a:xfrm>
             <a:prstGeom prst="ellipse">
@@ -4128,7 +4128,7 @@
           </p:nvSpPr>
           <p:spPr>
             <a:xfrm>
-              <a:off x="4994599" y="3087781"/>
+              <a:off x="4449773" y="3052572"/>
               <a:ext cx="117404" cy="117404"/>
             </a:xfrm>
             <a:prstGeom prst="ellipse">
@@ -4163,7 +4163,7 @@
           </p:nvSpPr>
           <p:spPr>
             <a:xfrm>
-              <a:off x="3326865" y="2813291"/>
+              <a:off x="3190597" y="2806018"/>
               <a:ext cx="117404" cy="117404"/>
             </a:xfrm>
             <a:prstGeom prst="ellipse">
@@ -4198,7 +4198,7 @@
           </p:nvSpPr>
           <p:spPr>
             <a:xfrm>
-              <a:off x="4872852" y="2334755"/>
+              <a:off x="4448779" y="2419195"/>
               <a:ext cx="117404" cy="117404"/>
             </a:xfrm>
             <a:prstGeom prst="ellipse">
@@ -4233,7 +4233,7 @@
           </p:nvSpPr>
           <p:spPr>
             <a:xfrm>
-              <a:off x="3149904" y="3139956"/>
+              <a:off x="3285868" y="2974127"/>
               <a:ext cx="117404" cy="117404"/>
             </a:xfrm>
             <a:prstGeom prst="ellipse">
@@ -4268,7 +4268,7 @@
           </p:nvSpPr>
           <p:spPr>
             <a:xfrm>
-              <a:off x="4570388" y="2181399"/>
+              <a:off x="4728532" y="2170531"/>
               <a:ext cx="117404" cy="117404"/>
             </a:xfrm>
             <a:prstGeom prst="ellipse">
@@ -4303,7 +4303,7 @@
           </p:nvSpPr>
           <p:spPr>
             <a:xfrm>
-              <a:off x="8091700" y="2317712"/>
+              <a:off x="7882824" y="2299960"/>
               <a:ext cx="117404" cy="117404"/>
             </a:xfrm>
             <a:prstGeom prst="ellipse">
@@ -4338,7 +4338,7 @@
           </p:nvSpPr>
           <p:spPr>
             <a:xfrm>
-              <a:off x="4388852" y="2776899"/>
+              <a:off x="4619000" y="2790645"/>
               <a:ext cx="117404" cy="117404"/>
             </a:xfrm>
             <a:prstGeom prst="ellipse">
@@ -4373,7 +4373,7 @@
           </p:nvSpPr>
           <p:spPr>
             <a:xfrm>
-              <a:off x="6393355" y="2405187"/>
+              <a:off x="6527805" y="2111723"/>
               <a:ext cx="117404" cy="117404"/>
             </a:xfrm>
             <a:prstGeom prst="ellipse">
@@ -4408,7 +4408,7 @@
           </p:nvSpPr>
           <p:spPr>
             <a:xfrm>
-              <a:off x="7961005" y="3292273"/>
+              <a:off x="8210363" y="3445990"/>
               <a:ext cx="117404" cy="117404"/>
             </a:xfrm>
             <a:prstGeom prst="ellipse">
@@ -4443,7 +4443,7 @@
           </p:nvSpPr>
           <p:spPr>
             <a:xfrm>
-              <a:off x="3167958" y="1992219"/>
+              <a:off x="2919605" y="1758721"/>
               <a:ext cx="117404" cy="117404"/>
             </a:xfrm>
             <a:prstGeom prst="ellipse">
@@ -4478,7 +4478,7 @@
           </p:nvSpPr>
           <p:spPr>
             <a:xfrm>
-              <a:off x="8082428" y="3645409"/>
+              <a:off x="8014532" y="3416287"/>
               <a:ext cx="117404" cy="117404"/>
             </a:xfrm>
             <a:prstGeom prst="ellipse">
@@ -4513,7 +4513,7 @@
           </p:nvSpPr>
           <p:spPr>
             <a:xfrm>
-              <a:off x="3088683" y="1469075"/>
+              <a:off x="2911165" y="1276272"/>
               <a:ext cx="117404" cy="117404"/>
             </a:xfrm>
             <a:prstGeom prst="ellipse">
@@ -4548,7 +4548,7 @@
           </p:nvSpPr>
           <p:spPr>
             <a:xfrm>
-              <a:off x="6429673" y="2349477"/>
+              <a:off x="6257703" y="2195638"/>
               <a:ext cx="117404" cy="117404"/>
             </a:xfrm>
             <a:prstGeom prst="ellipse">
@@ -4583,7 +4583,7 @@
           </p:nvSpPr>
           <p:spPr>
             <a:xfrm>
-              <a:off x="7887185" y="3103066"/>
+              <a:off x="7841944" y="2794925"/>
               <a:ext cx="117404" cy="117404"/>
             </a:xfrm>
             <a:prstGeom prst="ellipse">
@@ -4618,7 +4618,7 @@
           </p:nvSpPr>
           <p:spPr>
             <a:xfrm>
-              <a:off x="2887818" y="2996774"/>
+              <a:off x="3112909" y="2887936"/>
               <a:ext cx="117404" cy="117404"/>
             </a:xfrm>
             <a:prstGeom prst="ellipse">
@@ -4653,7 +4653,7 @@
           </p:nvSpPr>
           <p:spPr>
             <a:xfrm>
-              <a:off x="4773119" y="2362108"/>
+              <a:off x="4459490" y="2243304"/>
               <a:ext cx="117404" cy="117404"/>
             </a:xfrm>
             <a:prstGeom prst="ellipse">
@@ -4688,7 +4688,7 @@
           </p:nvSpPr>
           <p:spPr>
             <a:xfrm>
-              <a:off x="6382870" y="5165431"/>
+              <a:off x="6085553" y="5210689"/>
               <a:ext cx="117404" cy="117404"/>
             </a:xfrm>
             <a:prstGeom prst="ellipse">
@@ -4723,7 +4723,7 @@
           </p:nvSpPr>
           <p:spPr>
             <a:xfrm>
-              <a:off x="7618670" y="2172473"/>
+              <a:off x="7941087" y="2347858"/>
               <a:ext cx="117404" cy="117404"/>
             </a:xfrm>
             <a:prstGeom prst="ellipse">
@@ -4758,7 +4758,7 @@
           </p:nvSpPr>
           <p:spPr>
             <a:xfrm>
-              <a:off x="3220965" y="3110111"/>
+              <a:off x="3036703" y="3004739"/>
               <a:ext cx="117404" cy="117404"/>
             </a:xfrm>
             <a:prstGeom prst="ellipse">
@@ -4793,7 +4793,7 @@
           </p:nvSpPr>
           <p:spPr>
             <a:xfrm>
-              <a:off x="6544689" y="2410257"/>
+              <a:off x="6603669" y="2407978"/>
               <a:ext cx="117404" cy="117404"/>
             </a:xfrm>
             <a:prstGeom prst="ellipse">
@@ -4828,7 +4828,7 @@
           </p:nvSpPr>
           <p:spPr>
             <a:xfrm>
-              <a:off x="7962160" y="2590042"/>
+              <a:off x="7858923" y="2421950"/>
               <a:ext cx="117404" cy="117404"/>
             </a:xfrm>
             <a:prstGeom prst="ellipse">
@@ -4863,7 +4863,7 @@
           </p:nvSpPr>
           <p:spPr>
             <a:xfrm>
-              <a:off x="3204450" y="1671655"/>
+              <a:off x="3260107" y="1611336"/>
               <a:ext cx="117404" cy="117404"/>
             </a:xfrm>
             <a:prstGeom prst="ellipse">
@@ -4898,7 +4898,7 @@
           </p:nvSpPr>
           <p:spPr>
             <a:xfrm>
-              <a:off x="8095263" y="1786258"/>
+              <a:off x="7940695" y="1820484"/>
               <a:ext cx="117404" cy="117404"/>
             </a:xfrm>
             <a:prstGeom prst="ellipse">
@@ -4933,7 +4933,7 @@
           </p:nvSpPr>
           <p:spPr>
             <a:xfrm>
-              <a:off x="3043469" y="2309762"/>
+              <a:off x="3054537" y="2289243"/>
               <a:ext cx="117404" cy="117404"/>
             </a:xfrm>
             <a:prstGeom prst="ellipse">
@@ -4968,7 +4968,7 @@
           </p:nvSpPr>
           <p:spPr>
             <a:xfrm>
-              <a:off x="4683762" y="2243063"/>
+              <a:off x="4416554" y="2448888"/>
               <a:ext cx="117404" cy="117404"/>
             </a:xfrm>
             <a:prstGeom prst="ellipse">
@@ -5003,7 +5003,7 @@
           </p:nvSpPr>
           <p:spPr>
             <a:xfrm>
-              <a:off x="8017218" y="2246239"/>
+              <a:off x="7611707" y="2194158"/>
               <a:ext cx="117404" cy="117404"/>
             </a:xfrm>
             <a:prstGeom prst="ellipse">
@@ -5038,7 +5038,7 @@
           </p:nvSpPr>
           <p:spPr>
             <a:xfrm>
-              <a:off x="3128513" y="2510987"/>
+              <a:off x="2865106" y="2446654"/>
               <a:ext cx="117404" cy="117404"/>
             </a:xfrm>
             <a:prstGeom prst="ellipse">
@@ -5073,7 +5073,7 @@
           </p:nvSpPr>
           <p:spPr>
             <a:xfrm>
-              <a:off x="4873697" y="2524401"/>
+              <a:off x="4648945" y="2135018"/>
               <a:ext cx="117404" cy="117404"/>
             </a:xfrm>
             <a:prstGeom prst="ellipse">
@@ -5108,7 +5108,7 @@
           </p:nvSpPr>
           <p:spPr>
             <a:xfrm>
-              <a:off x="8132254" y="2930393"/>
+              <a:off x="7641215" y="2815429"/>
               <a:ext cx="117404" cy="117404"/>
             </a:xfrm>
             <a:prstGeom prst="ellipse">
@@ -5143,7 +5143,7 @@
           </p:nvSpPr>
           <p:spPr>
             <a:xfrm>
-              <a:off x="3347698" y="2220736"/>
+              <a:off x="3183754" y="2336807"/>
               <a:ext cx="117404" cy="117404"/>
             </a:xfrm>
             <a:prstGeom prst="ellipse">
@@ -5178,7 +5178,7 @@
           </p:nvSpPr>
           <p:spPr>
             <a:xfrm>
-              <a:off x="4903090" y="3033475"/>
+              <a:off x="4604746" y="2889922"/>
               <a:ext cx="117404" cy="117404"/>
             </a:xfrm>
             <a:prstGeom prst="ellipse">
@@ -5213,7 +5213,7 @@
           </p:nvSpPr>
           <p:spPr>
             <a:xfrm>
-              <a:off x="6064020" y="2728269"/>
+              <a:off x="6556042" y="2748772"/>
               <a:ext cx="117404" cy="117404"/>
             </a:xfrm>
             <a:prstGeom prst="ellipse">
@@ -5248,7 +5248,7 @@
           </p:nvSpPr>
           <p:spPr>
             <a:xfrm>
-              <a:off x="3082897" y="1901862"/>
+              <a:off x="3296193" y="1775406"/>
               <a:ext cx="117404" cy="117404"/>
             </a:xfrm>
             <a:prstGeom prst="ellipse">
@@ -5283,7 +5283,7 @@
           </p:nvSpPr>
           <p:spPr>
             <a:xfrm>
-              <a:off x="6389566" y="5068650"/>
+              <a:off x="6203229" y="5120007"/>
               <a:ext cx="117404" cy="117404"/>
             </a:xfrm>
             <a:prstGeom prst="ellipse">
@@ -5318,7 +5318,7 @@
           </p:nvSpPr>
           <p:spPr>
             <a:xfrm>
-              <a:off x="7731571" y="4166737"/>
+              <a:off x="8116881" y="3895763"/>
               <a:ext cx="117404" cy="117404"/>
             </a:xfrm>
             <a:prstGeom prst="ellipse">
@@ -5353,7 +5353,7 @@
           </p:nvSpPr>
           <p:spPr>
             <a:xfrm>
-              <a:off x="3133520" y="3511314"/>
+              <a:off x="3006467" y="3419060"/>
               <a:ext cx="117404" cy="117404"/>
             </a:xfrm>
             <a:prstGeom prst="ellipse">
@@ -5388,7 +5388,7 @@
           </p:nvSpPr>
           <p:spPr>
             <a:xfrm>
-              <a:off x="4588509" y="3004963"/>
+              <a:off x="4946664" y="2867174"/>
               <a:ext cx="117404" cy="117404"/>
             </a:xfrm>
             <a:prstGeom prst="ellipse">
@@ -5423,7 +5423,7 @@
           </p:nvSpPr>
           <p:spPr>
             <a:xfrm>
-              <a:off x="6525079" y="3167584"/>
+              <a:off x="6534306" y="2971816"/>
               <a:ext cx="117404" cy="117404"/>
             </a:xfrm>
             <a:prstGeom prst="ellipse">
@@ -5479,15 +5479,15 @@
           </p:nvSpPr>
           <p:spPr>
             <a:xfrm>
-              <a:off x="3140611" y="1872185"/>
-              <a:ext cx="0" cy="566201"/>
+              <a:off x="3140611" y="1843402"/>
+              <a:ext cx="0" cy="537418"/>
             </a:xfrm>
             <a:custGeom>
               <a:avLst/>
               <a:pathLst>
-                <a:path w="0" h="566201">
+                <a:path w="0" h="537418">
                   <a:moveTo>
-                    <a:pt x="0" y="566201"/>
+                    <a:pt x="0" y="537418"/>
                   </a:moveTo>
                   <a:lnTo>
                     <a:pt x="0" y="0"/>
@@ -5519,18 +5519,18 @@
           </p:nvSpPr>
           <p:spPr>
             <a:xfrm>
-              <a:off x="3140611" y="3004587"/>
-              <a:ext cx="0" cy="566201"/>
+              <a:off x="3140611" y="2918239"/>
+              <a:ext cx="0" cy="537418"/>
             </a:xfrm>
             <a:custGeom>
               <a:avLst/>
               <a:pathLst>
-                <a:path w="0" h="566201">
+                <a:path w="0" h="537418">
                   <a:moveTo>
                     <a:pt x="0" y="0"/>
                   </a:moveTo>
                   <a:lnTo>
-                    <a:pt x="0" y="566201"/>
+                    <a:pt x="0" y="537418"/>
                   </a:lnTo>
                 </a:path>
               </a:pathLst>
@@ -5559,21 +5559,21 @@
           </p:nvSpPr>
           <p:spPr>
             <a:xfrm>
-              <a:off x="2536811" y="2438386"/>
-              <a:ext cx="1207600" cy="566201"/>
+              <a:off x="2536811" y="2380821"/>
+              <a:ext cx="1207600" cy="537418"/>
             </a:xfrm>
             <a:custGeom>
               <a:avLst/>
               <a:pathLst>
-                <a:path w="1207600" h="566201">
+                <a:path w="1207600" h="537418">
                   <a:moveTo>
                     <a:pt x="0" y="0"/>
                   </a:moveTo>
                   <a:lnTo>
-                    <a:pt x="0" y="566201"/>
+                    <a:pt x="0" y="537418"/>
                   </a:lnTo>
                   <a:lnTo>
-                    <a:pt x="1207600" y="566201"/>
+                    <a:pt x="1207600" y="537418"/>
                   </a:lnTo>
                   <a:lnTo>
                     <a:pt x="1207600" y="0"/>
@@ -5606,7 +5606,7 @@
           </p:nvSpPr>
           <p:spPr>
             <a:xfrm>
-              <a:off x="2536811" y="2721487"/>
+              <a:off x="2536811" y="2649530"/>
               <a:ext cx="1207600" cy="0"/>
             </a:xfrm>
             <a:custGeom>
@@ -5646,7 +5646,7 @@
           </p:nvSpPr>
           <p:spPr>
             <a:xfrm>
-              <a:off x="4750745" y="2438386"/>
+              <a:off x="4750745" y="2380821"/>
               <a:ext cx="0" cy="0"/>
             </a:xfrm>
             <a:custGeom>
@@ -5686,18 +5686,18 @@
           </p:nvSpPr>
           <p:spPr>
             <a:xfrm>
-              <a:off x="4750745" y="3004587"/>
-              <a:ext cx="0" cy="566201"/>
+              <a:off x="4750745" y="2918239"/>
+              <a:ext cx="0" cy="537418"/>
             </a:xfrm>
             <a:custGeom>
               <a:avLst/>
               <a:pathLst>
-                <a:path w="0" h="566201">
+                <a:path w="0" h="537418">
                   <a:moveTo>
                     <a:pt x="0" y="0"/>
                   </a:moveTo>
                   <a:lnTo>
-                    <a:pt x="0" y="566201"/>
+                    <a:pt x="0" y="537418"/>
                   </a:lnTo>
                 </a:path>
               </a:pathLst>
@@ -5726,21 +5726,21 @@
           </p:nvSpPr>
           <p:spPr>
             <a:xfrm>
-              <a:off x="4146945" y="2438386"/>
-              <a:ext cx="1207600" cy="566201"/>
+              <a:off x="4146945" y="2380821"/>
+              <a:ext cx="1207600" cy="537418"/>
             </a:xfrm>
             <a:custGeom>
               <a:avLst/>
               <a:pathLst>
-                <a:path w="1207600" h="566201">
+                <a:path w="1207600" h="537418">
                   <a:moveTo>
                     <a:pt x="0" y="0"/>
                   </a:moveTo>
                   <a:lnTo>
-                    <a:pt x="0" y="566201"/>
+                    <a:pt x="0" y="537418"/>
                   </a:lnTo>
                   <a:lnTo>
-                    <a:pt x="1207600" y="566201"/>
+                    <a:pt x="1207600" y="537418"/>
                   </a:lnTo>
                   <a:lnTo>
                     <a:pt x="1207600" y="0"/>
@@ -5773,7 +5773,7 @@
           </p:nvSpPr>
           <p:spPr>
             <a:xfrm>
-              <a:off x="4146945" y="3004587"/>
+              <a:off x="4146945" y="2918239"/>
               <a:ext cx="1207600" cy="0"/>
             </a:xfrm>
             <a:custGeom>
@@ -5813,7 +5813,7 @@
           </p:nvSpPr>
           <p:spPr>
             <a:xfrm>
-              <a:off x="6360878" y="2438386"/>
+              <a:off x="6360878" y="2380821"/>
               <a:ext cx="0" cy="0"/>
             </a:xfrm>
             <a:custGeom>
@@ -5853,18 +5853,18 @@
           </p:nvSpPr>
           <p:spPr>
             <a:xfrm>
-              <a:off x="6360878" y="4136989"/>
-              <a:ext cx="0" cy="1132402"/>
+              <a:off x="6360878" y="3993076"/>
+              <a:ext cx="0" cy="1074836"/>
             </a:xfrm>
             <a:custGeom>
               <a:avLst/>
               <a:pathLst>
-                <a:path w="0" h="1132402">
+                <a:path w="0" h="1074836">
                   <a:moveTo>
                     <a:pt x="0" y="0"/>
                   </a:moveTo>
                   <a:lnTo>
-                    <a:pt x="0" y="1132402"/>
+                    <a:pt x="0" y="1074836"/>
                   </a:lnTo>
                 </a:path>
               </a:pathLst>
@@ -5893,21 +5893,21 @@
           </p:nvSpPr>
           <p:spPr>
             <a:xfrm>
-              <a:off x="5757078" y="2438386"/>
-              <a:ext cx="1207600" cy="1698603"/>
+              <a:off x="5757078" y="2380821"/>
+              <a:ext cx="1207600" cy="1612255"/>
             </a:xfrm>
             <a:custGeom>
               <a:avLst/>
               <a:pathLst>
-                <a:path w="1207600" h="1698603">
+                <a:path w="1207600" h="1612255">
                   <a:moveTo>
                     <a:pt x="0" y="0"/>
                   </a:moveTo>
                   <a:lnTo>
-                    <a:pt x="0" y="1698603"/>
+                    <a:pt x="0" y="1612255"/>
                   </a:lnTo>
                   <a:lnTo>
-                    <a:pt x="1207600" y="1698603"/>
+                    <a:pt x="1207600" y="1612255"/>
                   </a:lnTo>
                   <a:lnTo>
                     <a:pt x="1207600" y="0"/>
@@ -5940,7 +5940,7 @@
           </p:nvSpPr>
           <p:spPr>
             <a:xfrm>
-              <a:off x="5757078" y="3004587"/>
+              <a:off x="5757078" y="2918239"/>
               <a:ext cx="1207600" cy="0"/>
             </a:xfrm>
             <a:custGeom>
@@ -5980,15 +5980,15 @@
           </p:nvSpPr>
           <p:spPr>
             <a:xfrm>
-              <a:off x="7971012" y="1872185"/>
-              <a:ext cx="0" cy="566201"/>
+              <a:off x="7971012" y="1843402"/>
+              <a:ext cx="0" cy="537418"/>
             </a:xfrm>
             <a:custGeom>
               <a:avLst/>
               <a:pathLst>
-                <a:path w="0" h="566201">
+                <a:path w="0" h="537418">
                   <a:moveTo>
-                    <a:pt x="0" y="566201"/>
+                    <a:pt x="0" y="537418"/>
                   </a:moveTo>
                   <a:lnTo>
                     <a:pt x="0" y="0"/>
@@ -6020,18 +6020,18 @@
           </p:nvSpPr>
           <p:spPr>
             <a:xfrm>
-              <a:off x="7971012" y="3146138"/>
-              <a:ext cx="0" cy="990851"/>
+              <a:off x="7971012" y="3052594"/>
+              <a:ext cx="0" cy="940482"/>
             </a:xfrm>
             <a:custGeom>
               <a:avLst/>
               <a:pathLst>
-                <a:path w="0" h="990851">
+                <a:path w="0" h="940482">
                   <a:moveTo>
                     <a:pt x="0" y="0"/>
                   </a:moveTo>
                   <a:lnTo>
-                    <a:pt x="0" y="990851"/>
+                    <a:pt x="0" y="940482"/>
                   </a:lnTo>
                 </a:path>
               </a:pathLst>
@@ -6060,21 +6060,21 @@
           </p:nvSpPr>
           <p:spPr>
             <a:xfrm>
-              <a:off x="7367212" y="2438386"/>
-              <a:ext cx="1207600" cy="707751"/>
+              <a:off x="7367212" y="2380821"/>
+              <a:ext cx="1207600" cy="671772"/>
             </a:xfrm>
             <a:custGeom>
               <a:avLst/>
               <a:pathLst>
-                <a:path w="1207600" h="707751">
+                <a:path w="1207600" h="671772">
                   <a:moveTo>
                     <a:pt x="0" y="0"/>
                   </a:moveTo>
                   <a:lnTo>
-                    <a:pt x="0" y="707751"/>
+                    <a:pt x="0" y="671772"/>
                   </a:lnTo>
                   <a:lnTo>
-                    <a:pt x="1207600" y="707751"/>
+                    <a:pt x="1207600" y="671772"/>
                   </a:lnTo>
                   <a:lnTo>
                     <a:pt x="1207600" y="0"/>
@@ -6107,7 +6107,7 @@
           </p:nvSpPr>
           <p:spPr>
             <a:xfrm>
-              <a:off x="7367212" y="2721487"/>
+              <a:off x="7367212" y="2649530"/>
               <a:ext cx="1207600" cy="0"/>
             </a:xfrm>
             <a:custGeom>
@@ -6217,7 +6217,7 @@
           </p:nvSpPr>
           <p:spPr>
             <a:xfrm>
-              <a:off x="2005954" y="4634451"/>
+              <a:off x="2005954" y="4461754"/>
               <a:ext cx="105947" cy="136921"/>
             </a:xfrm>
             <a:prstGeom prst="rect">
@@ -6263,7 +6263,7 @@
           </p:nvSpPr>
           <p:spPr>
             <a:xfrm>
-              <a:off x="2005954" y="3502606"/>
+              <a:off x="2005954" y="3387475"/>
               <a:ext cx="105947" cy="136363"/>
             </a:xfrm>
             <a:prstGeom prst="rect">
@@ -6309,7 +6309,7 @@
           </p:nvSpPr>
           <p:spPr>
             <a:xfrm>
-              <a:off x="2005954" y="2367321"/>
+              <a:off x="2005954" y="2309755"/>
               <a:ext cx="105947" cy="139247"/>
             </a:xfrm>
             <a:prstGeom prst="rect">
@@ -6401,7 +6401,7 @@
           </p:nvSpPr>
           <p:spPr>
             <a:xfrm>
-              <a:off x="2139737" y="4703191"/>
+              <a:off x="2139737" y="4530494"/>
               <a:ext cx="34794" cy="0"/>
             </a:xfrm>
             <a:custGeom>
@@ -6441,7 +6441,7 @@
           </p:nvSpPr>
           <p:spPr>
             <a:xfrm>
-              <a:off x="2139737" y="3570788"/>
+              <a:off x="2139737" y="3455657"/>
               <a:ext cx="34794" cy="0"/>
             </a:xfrm>
             <a:custGeom>
@@ -6481,7 +6481,7 @@
           </p:nvSpPr>
           <p:spPr>
             <a:xfrm>
-              <a:off x="2139737" y="2438386"/>
+              <a:off x="2139737" y="2380821"/>
               <a:ext cx="34794" cy="0"/>
             </a:xfrm>
             <a:custGeom>
